--- a/ScholarBot_AI_Portfolio.pptx
+++ b/ScholarBot_AI_Portfolio.pptx
@@ -179,29 +179,32 @@
           </c:dLbls>
           <c:cat>
             <c:multiLvlStrRef>
-              <c:f>Sheet1!$A$2:$A$8</c:f>
+              <c:f>Sheet1!$A$2:$A$9</c:f>
               <c:multiLvlStrCache>
-                <c:ptCount val="7"/>
+                <c:ptCount val="8"/>
                 <c:lvl>
                   <c:pt idx="0">
                     <c:v>session_helpers</c:v>
                   </c:pt>
                   <c:pt idx="1">
+                    <c:v>rag_context</c:v>
+                  </c:pt>
+                  <c:pt idx="2">
                     <c:v>llm_client</c:v>
                   </c:pt>
-                  <c:pt idx="2">
+                  <c:pt idx="3">
+                    <c:v>api</c:v>
+                  </c:pt>
+                  <c:pt idx="4">
                     <c:v>services</c:v>
                   </c:pt>
-                  <c:pt idx="3">
+                  <c:pt idx="5">
                     <c:v>streaming</c:v>
                   </c:pt>
-                  <c:pt idx="4">
+                  <c:pt idx="6">
                     <c:v>ui_tokens</c:v>
                   </c:pt>
-                  <c:pt idx="5">
-                    <c:v>api</c:v>
-                  </c:pt>
-                  <c:pt idx="6">
+                  <c:pt idx="7">
                     <c:v>react_bridge</c:v>
                   </c:pt>
                 </c:lvl>
@@ -210,29 +213,32 @@
           </c:cat>
           <c:val>
             <c:numRef>
-              <c:f>Sheet1!$B$2:$B$8</c:f>
+              <c:f>Sheet1!$B$2:$B$9</c:f>
               <c:numCache>
                 <c:formatCode>General</c:formatCode>
-                <c:ptCount val="7"/>
+                <c:ptCount val="8"/>
                 <c:pt idx="0">
                   <c:v>25</c:v>
                 </c:pt>
                 <c:pt idx="1">
+                  <c:v>16</c:v>
+                </c:pt>
+                <c:pt idx="2">
                   <c:v>15</c:v>
                 </c:pt>
-                <c:pt idx="2">
+                <c:pt idx="3">
+                  <c:v>13</c:v>
+                </c:pt>
+                <c:pt idx="4">
                   <c:v>12</c:v>
                 </c:pt>
-                <c:pt idx="3">
+                <c:pt idx="5">
                   <c:v>11</c:v>
                 </c:pt>
-                <c:pt idx="4">
+                <c:pt idx="6">
                   <c:v>11</c:v>
                 </c:pt>
-                <c:pt idx="5">
-                  <c:v>10</c:v>
-                </c:pt>
-                <c:pt idx="6">
+                <c:pt idx="7">
                   <c:v>8</c:v>
                 </c:pt>
               </c:numCache>
@@ -1034,7 +1040,7 @@
           <a:p>
             <a:r>
               <a:rPr lang="en-US" dirty="0"/>
-              <a:t>Angka nyata dari repositori: pytest 92 tes lulus semua. Modul session_helpers paling banyak diuji karena memuat logika prompt dan deteksi intent.</a:t>
+              <a:t>Angka nyata dari repositori: pytest 111 tes lulus semua. Modul session_helpers paling banyak diuji karena memuat logika prompt dan deteksi intent.</a:t>
             </a:r>
             <a:endParaRPr lang="en-US" dirty="0"/>
           </a:p>
@@ -2674,7 +2680,7 @@
         <p:spPr>
           <a:xfrm>
             <a:off x="3479292" y="3977640"/>
-            <a:ext cx="2212848" cy="384048"/>
+            <a:ext cx="2116836" cy="384048"/>
           </a:xfrm>
           <a:prstGeom prst="roundRect">
             <a:avLst>
@@ -2705,7 +2711,7 @@
         <p:spPr>
           <a:xfrm>
             <a:off x="3479292" y="3977640"/>
-            <a:ext cx="2212848" cy="384048"/>
+            <a:ext cx="2116836" cy="384048"/>
           </a:xfrm>
           <a:prstGeom prst="rect">
             <a:avLst/>
@@ -2729,7 +2735,7 @@
                 <a:ea typeface="Calibri" pitchFamily="34" charset="-122"/>
                 <a:cs typeface="Calibri" pitchFamily="34" charset="-120"/>
               </a:rPr>
-              <a:t>Groq · Llama 3.3 70B</a:t>
+              <a:t>Groq · GPT-OSS 120B</a:t>
             </a:r>
             <a:endParaRPr lang="en-US" sz="1200" dirty="0"/>
           </a:p>
@@ -2743,7 +2749,7 @@
         </p:nvSpPr>
         <p:spPr>
           <a:xfrm>
-            <a:off x="5838444" y="3977640"/>
+            <a:off x="5742432" y="3977640"/>
             <a:ext cx="1348740" cy="384048"/>
           </a:xfrm>
           <a:prstGeom prst="roundRect">
@@ -2774,7 +2780,7 @@
         </p:nvSpPr>
         <p:spPr>
           <a:xfrm>
-            <a:off x="5838444" y="3977640"/>
+            <a:off x="5742432" y="3977640"/>
             <a:ext cx="1348740" cy="384048"/>
           </a:xfrm>
           <a:prstGeom prst="rect">
@@ -4772,7 +4778,7 @@
                 <a:ea typeface="Calibri" pitchFamily="34" charset="-122"/>
                 <a:cs typeface="Calibri" pitchFamily="34" charset="-120"/>
               </a:rPr>
-              <a:t>Llama 3.3 70B</a:t>
+              <a:t>GPT-OSS 120B</a:t>
             </a:r>
             <a:endParaRPr lang="en-US" sz="1250" dirty="0"/>
           </a:p>
@@ -5228,7 +5234,7 @@
                 <a:ea typeface="Calibri" pitchFamily="34" charset="-122"/>
                 <a:cs typeface="Calibri" pitchFamily="34" charset="-120"/>
               </a:rPr>
-              <a:t>pytest — 92 tes</a:t>
+              <a:t>pytest — 111 tes</a:t>
             </a:r>
             <a:endParaRPr lang="en-US" sz="1250" dirty="0"/>
           </a:p>
@@ -5799,7 +5805,7 @@
                 <a:ea typeface="Cambria" pitchFamily="34" charset="-122"/>
                 <a:cs typeface="Cambria" pitchFamily="34" charset="-120"/>
               </a:rPr>
-              <a:t>92 / 92</a:t>
+              <a:t>111 / 111</a:t>
             </a:r>
             <a:endParaRPr lang="en-US" sz="3200" dirty="0"/>
           </a:p>
@@ -5838,7 +5844,7 @@
                 <a:ea typeface="Calibri" pitchFamily="34" charset="-122"/>
                 <a:cs typeface="Calibri" pitchFamily="34" charset="-120"/>
               </a:rPr>
-              <a:t>tes otomatis lulus dalam 3,9 detik</a:t>
+              <a:t>tes otomatis lulus, tanpa yang di-skip</a:t>
             </a:r>
             <a:endParaRPr lang="en-US" sz="1300" dirty="0"/>
           </a:p>
@@ -6135,7 +6141,7 @@
                 <a:ea typeface="Cambria" pitchFamily="34" charset="-122"/>
                 <a:cs typeface="Cambria" pitchFamily="34" charset="-120"/>
               </a:rPr>
-              <a:t>Distribusi 92 tes per modul</a:t>
+              <a:t>Distribusi 111 tes per modul</a:t>
             </a:r>
             <a:endParaRPr lang="en-US" sz="1600" dirty="0"/>
           </a:p>
@@ -6456,7 +6462,7 @@
                 <a:ea typeface="Calibri" pitchFamily="34" charset="-122"/>
                 <a:cs typeface="Calibri" pitchFamily="34" charset="-120"/>
               </a:rPr>
-              <a:t>Rendering di-throttle dan token dibuffer sehingga UI tetap mulus saat token mengalir ~8.000/detik.</a:t>
+              <a:t>Rendering di-throttle dan token dibuffer sehingga UI tetap mulus saat token mengalir sangat cepat.</a:t>
             </a:r>
             <a:endParaRPr lang="en-US" sz="1250" dirty="0"/>
           </a:p>
@@ -7585,7 +7591,7 @@
                 <a:ea typeface="Calibri" pitchFamily="34" charset="-122"/>
                 <a:cs typeface="Calibri" pitchFamily="34" charset="-120"/>
               </a:rPr>
-              <a:t>Semantic search NumPy, chunking adaptif, quiz + mastery.</a:t>
+              <a:t>Semantic search NumPy, chunking adaptif, quiz + mastery, sitasi inline.</a:t>
             </a:r>
             <a:endParaRPr lang="en-US" sz="1200" dirty="0"/>
           </a:p>
@@ -7807,7 +7813,7 @@
                 <a:ea typeface="Calibri" pitchFamily="34" charset="-122"/>
                 <a:cs typeface="Calibri" pitchFamily="34" charset="-120"/>
               </a:rPr>
-              <a:t>Vector DB opsional, sitasi inline, ekspor chat, interaksi suara.</a:t>
+              <a:t>Vector DB opsional, multi-agent, ekspor chat, interaksi suara.</a:t>
             </a:r>
             <a:endParaRPr lang="en-US" sz="1200" dirty="0"/>
           </a:p>
@@ -8673,7 +8679,7 @@
                 <a:ea typeface="Cambria" pitchFamily="34" charset="-122"/>
                 <a:cs typeface="Cambria" pitchFamily="34" charset="-120"/>
               </a:rPr>
-              <a:t>92</a:t>
+              <a:t>111</a:t>
             </a:r>
             <a:endParaRPr lang="en-US" sz="3000" dirty="0"/>
           </a:p>
@@ -11301,7 +11307,7 @@
                 <a:ea typeface="Calibri" pitchFamily="34" charset="-122"/>
                 <a:cs typeface="Calibri" pitchFamily="34" charset="-120"/>
               </a:rPr>
-              <a:t>Groq · Llama 3.3 70B</a:t>
+              <a:t>Groq · GPT-OSS 120B</a:t>
             </a:r>
             <a:endParaRPr lang="en-US" sz="1250" dirty="0"/>
           </a:p>
@@ -12113,7 +12119,7 @@
                 <a:ea typeface="Cambria" pitchFamily="34" charset="-122"/>
                 <a:cs typeface="Cambria" pitchFamily="34" charset="-120"/>
               </a:rPr>
-              <a:t>Semantic Search</a:t>
+              <a:t>Semantic Search + Sitasi</a:t>
             </a:r>
             <a:endParaRPr lang="en-US" sz="1600" dirty="0"/>
           </a:p>
@@ -12155,7 +12161,7 @@
                 <a:ea typeface="Calibri" pitchFamily="34" charset="-122"/>
                 <a:cs typeface="Calibri" pitchFamily="34" charset="-120"/>
               </a:rPr>
-              <a:t>Pencarian berbasis makna dengan cosine similarity, bukan sekadar cocok kata.</a:t>
+              <a:t>Pencarian berbasis makna, dan tiap klaim ditandai [n] ke potongan sumbernya.</a:t>
             </a:r>
             <a:endParaRPr lang="en-US" sz="1250" dirty="0"/>
           </a:p>
@@ -13952,7 +13958,7 @@
                 <a:ea typeface="Calibri" pitchFamily="34" charset="-122"/>
                 <a:cs typeface="Calibri" pitchFamily="34" charset="-120"/>
               </a:rPr>
-              <a:t>Konteks disuntik ke prompt, dijawab Llama 3.3 70B</a:t>
+              <a:t>Konteks disuntik ke prompt, dijawab GPT-OSS 120B</a:t>
             </a:r>
             <a:endParaRPr lang="en-US" sz="1150" dirty="0"/>
           </a:p>
@@ -16524,7 +16530,7 @@
                 <a:ea typeface="Calibri" pitchFamily="34" charset="-122"/>
                 <a:cs typeface="Calibri" pitchFamily="34" charset="-120"/>
               </a:rPr>
-              <a:t>Endpoint /api/quiz meminta Llama 3.3 70B membuat soal pilihan ganda dari riwayat topik.</a:t>
+              <a:t>Endpoint /api/quiz meminta model Groq membuat soal pilihan ganda dari riwayat topik.</a:t>
             </a:r>
             <a:endParaRPr lang="en-US" sz="1250" dirty="0"/>
           </a:p>
